--- a/docs/slides/unit10/unit10_praesenz.pptx
+++ b/docs/slides/unit10/unit10_praesenz.pptx
@@ -386,7 +386,7 @@
             <a:pPr indent="0" algn="r">
               <a:buNone/>
             </a:pPr>
-            <a:fld id="{14A447F7-E69B-4778-AE6E-F838E545B382}" type="slidenum">
+            <a:fld id="{097A7813-BC2A-44BE-8428-F46EFA09CE95}" type="slidenum">
               <a:rPr b="0" lang="en-US" sz="1400" spc="-1" strike="noStrike">
                 <a:solidFill>
                   <a:srgbClr val="000000"/>
@@ -6870,7 +6870,7 @@
         <p:txBody>
           <a:bodyPr/>
           <a:p>
-            <a:fld id="{8C94394D-B828-4D28-B6AA-B15C03A5AAFA}" type="slidenum">
+            <a:fld id="{F0F5D913-B021-45E8-B441-20E319A881E9}" type="slidenum">
               <a:t>&lt;#&gt;</a:t>
             </a:fld>
           </a:p>
@@ -6972,7 +6972,7 @@
         <p:txBody>
           <a:bodyPr/>
           <a:p>
-            <a:fld id="{41EB75DA-6289-4DDF-B603-F305C6894CEF}" type="slidenum">
+            <a:fld id="{BC898FDE-DA76-45B1-89D8-C7CFA4B52835}" type="slidenum">
               <a:t>&lt;#&gt;</a:t>
             </a:fld>
           </a:p>
@@ -7034,7 +7034,7 @@
         <p:txBody>
           <a:bodyPr/>
           <a:p>
-            <a:fld id="{EB13783F-F440-4C48-8391-1F428DE82C8F}" type="slidenum">
+            <a:fld id="{D3C03448-ADD2-412B-8872-25FBBD240333}" type="slidenum">
               <a:t>&lt;#&gt;</a:t>
             </a:fld>
           </a:p>
@@ -7182,7 +7182,7 @@
         <p:txBody>
           <a:bodyPr/>
           <a:p>
-            <a:fld id="{DC1FFF31-E91A-44BB-A2A6-C58CE5267A31}" type="slidenum">
+            <a:fld id="{52A063CE-3F64-4065-B886-8AF2AA96C6F4}" type="slidenum">
               <a:t>&lt;#&gt;</a:t>
             </a:fld>
           </a:p>
@@ -7244,7 +7244,7 @@
         <p:txBody>
           <a:bodyPr/>
           <a:p>
-            <a:fld id="{0A1D0ED5-FE62-433C-9678-5D3116DED780}" type="slidenum">
+            <a:fld id="{11BD8429-7F9C-4A80-985B-F8C8C9191715}" type="slidenum">
               <a:t>&lt;#&gt;</a:t>
             </a:fld>
           </a:p>
@@ -7392,7 +7392,7 @@
         <p:txBody>
           <a:bodyPr/>
           <a:p>
-            <a:fld id="{1C90AD3A-0B05-4244-9FE2-8B7A78DBF447}" type="slidenum">
+            <a:fld id="{7DA610C1-6D30-487C-BEB5-3E98D3430758}" type="slidenum">
               <a:t>&lt;#&gt;</a:t>
             </a:fld>
           </a:p>
@@ -7454,7 +7454,7 @@
         <p:txBody>
           <a:bodyPr/>
           <a:p>
-            <a:fld id="{5DF23744-A802-4BA5-BCF8-A7C7AD54FED1}" type="slidenum">
+            <a:fld id="{A3CA61AE-1C6B-4AE1-8D82-46F6A2E08F1F}" type="slidenum">
               <a:t>&lt;#&gt;</a:t>
             </a:fld>
           </a:p>
@@ -7516,7 +7516,7 @@
         <p:txBody>
           <a:bodyPr/>
           <a:p>
-            <a:fld id="{D32E18FD-7726-4B5C-AA5E-B4F98836F9AD}" type="slidenum">
+            <a:fld id="{9EAAED8E-10D0-496C-94E6-CC569776F40F}" type="slidenum">
               <a:t>&lt;#&gt;</a:t>
             </a:fld>
           </a:p>
@@ -7578,7 +7578,7 @@
         <p:txBody>
           <a:bodyPr/>
           <a:p>
-            <a:fld id="{0F087A22-143A-4D43-9BF7-FF565138D1EC}" type="slidenum">
+            <a:fld id="{22A5335F-7AFC-47A1-AB4A-07078B2C9AD9}" type="slidenum">
               <a:t>&lt;#&gt;</a:t>
             </a:fld>
           </a:p>
@@ -7640,7 +7640,7 @@
         <p:txBody>
           <a:bodyPr/>
           <a:p>
-            <a:fld id="{16F340D1-9D86-48B3-8E1F-6209451B614A}" type="slidenum">
+            <a:fld id="{E42950FD-257C-4308-B224-E1C06788E25C}" type="slidenum">
               <a:t>&lt;#&gt;</a:t>
             </a:fld>
           </a:p>
@@ -7742,7 +7742,7 @@
         <p:txBody>
           <a:bodyPr/>
           <a:p>
-            <a:fld id="{5F6C08AC-8295-42E9-9976-C4C90F594A41}" type="slidenum">
+            <a:fld id="{94767163-9448-4BF0-95CF-1CB9439D2CED}" type="slidenum">
               <a:t>&lt;#&gt;</a:t>
             </a:fld>
           </a:p>
@@ -7804,7 +7804,7 @@
         <p:txBody>
           <a:bodyPr/>
           <a:p>
-            <a:fld id="{25771217-0E09-4D13-BD07-811DF6BF3FD1}" type="slidenum">
+            <a:fld id="{B80C2C9D-C3C1-4CDD-95F8-4FA0B5853629}" type="slidenum">
               <a:t>&lt;#&gt;</a:t>
             </a:fld>
           </a:p>
@@ -7866,7 +7866,7 @@
         <p:txBody>
           <a:bodyPr/>
           <a:p>
-            <a:fld id="{E4DADF44-6B13-4D3B-B52B-5E8F08EB2BCF}" type="slidenum">
+            <a:fld id="{229A1F5D-D29D-4564-8B1A-50FE576D4297}" type="slidenum">
               <a:t>&lt;#&gt;</a:t>
             </a:fld>
           </a:p>
@@ -14674,7 +14674,7 @@
               </a:lnSpc>
               <a:buNone/>
             </a:pPr>
-            <a:fld id="{D40E0ECD-7531-4651-BE71-6B3E6CDEB4DF}" type="slidenum">
+            <a:fld id="{FF7BF716-5E29-4646-96E8-4D12BBC323B2}" type="slidenum">
               <a:rPr b="0" lang="de-DE" sz="800" spc="-1" strike="noStrike">
                 <a:solidFill>
                   <a:schemeClr val="dk1"/>
@@ -14900,7 +14900,7 @@
               </a:lnSpc>
               <a:buNone/>
             </a:pPr>
-            <a:fld id="{39BBDF24-433C-4268-BEDB-C4E2A50D0A16}" type="slidenum">
+            <a:fld id="{9E04E788-9967-43CF-A8D0-ADB6E9C509D8}" type="slidenum">
               <a:rPr b="0" lang="de-DE" sz="800" spc="-1" strike="noStrike">
                 <a:solidFill>
                   <a:schemeClr val="lt1"/>
@@ -15622,7 +15622,7 @@
               </a:lnSpc>
               <a:buNone/>
             </a:pPr>
-            <a:fld id="{29240DC7-0396-47A7-AAD0-071F377F47AD}" type="slidenum">
+            <a:fld id="{20590580-2595-4539-8953-C778D33E430E}" type="slidenum">
               <a:rPr b="0" lang="de-DE" sz="800" spc="-1" strike="noStrike">
                 <a:solidFill>
                   <a:schemeClr val="lt1"/>
@@ -16067,7 +16067,7 @@
               </a:lnSpc>
               <a:buNone/>
             </a:pPr>
-            <a:fld id="{D709D591-8F89-49F6-8280-50E4CB138B7F}" type="slidenum">
+            <a:fld id="{3BB5A53D-D1D4-4419-8B01-8949B76515BC}" type="slidenum">
               <a:rPr b="0" lang="de-DE" sz="800" spc="-1" strike="noStrike">
                 <a:solidFill>
                   <a:schemeClr val="dk1"/>
@@ -16622,7 +16622,7 @@
               </a:lnSpc>
               <a:buNone/>
             </a:pPr>
-            <a:fld id="{1BD352CC-73A1-4A6D-AE7C-E7CE65095D42}" type="slidenum">
+            <a:fld id="{8C889E6E-DDA2-4A74-8460-0F40847EECE0}" type="slidenum">
               <a:rPr b="0" lang="de-DE" sz="800" spc="-1" strike="noStrike">
                 <a:solidFill>
                   <a:schemeClr val="dk1"/>
@@ -17262,7 +17262,7 @@
               </a:lnSpc>
               <a:buNone/>
             </a:pPr>
-            <a:fld id="{E3662A6E-20DB-422C-B3A2-93005FFB0E7D}" type="slidenum">
+            <a:fld id="{6C9EEAAF-2810-4566-94F8-ADD3C40A292A}" type="slidenum">
               <a:rPr b="0" lang="de-DE" sz="800" spc="-1" strike="noStrike">
                 <a:solidFill>
                   <a:schemeClr val="dk1"/>
@@ -18043,7 +18043,7 @@
               </a:lnSpc>
               <a:buNone/>
             </a:pPr>
-            <a:fld id="{70BAD8F6-ACFC-473E-A5CE-8E5058A6ECE2}" type="slidenum">
+            <a:fld id="{FBE5A7B1-4A0C-489C-BC07-28A863FB0D61}" type="slidenum">
               <a:rPr b="0" lang="de-DE" sz="800" spc="-1" strike="noStrike">
                 <a:solidFill>
                   <a:schemeClr val="dk1"/>
@@ -18762,7 +18762,7 @@
               </a:lnSpc>
               <a:buNone/>
             </a:pPr>
-            <a:fld id="{ED8A77C6-5B72-4036-8A62-E5A7DB2ABE79}" type="slidenum">
+            <a:fld id="{E544D577-39D3-4401-B1FE-BC5B69A04633}" type="slidenum">
               <a:rPr b="0" lang="de-DE" sz="800" spc="-1" strike="noStrike">
                 <a:solidFill>
                   <a:schemeClr val="dk1"/>
@@ -19316,7 +19316,7 @@
               </a:lnSpc>
               <a:buNone/>
             </a:pPr>
-            <a:fld id="{46973004-33B3-4F5B-9793-EE6B5DF9CAB6}" type="slidenum">
+            <a:fld id="{8FF93B5C-F072-4926-9BED-533E53FD7AA3}" type="slidenum">
               <a:rPr b="0" lang="de-DE" sz="800" spc="-1" strike="noStrike">
                 <a:solidFill>
                   <a:schemeClr val="dk1"/>
@@ -19542,7 +19542,7 @@
               </a:lnSpc>
               <a:buNone/>
             </a:pPr>
-            <a:fld id="{0BEACD9B-8A77-48F9-BA73-5E27089F86D2}" type="slidenum">
+            <a:fld id="{DF8CC7A7-8F0E-43C0-B973-D8219A79DF02}" type="slidenum">
               <a:rPr b="0" lang="de-DE" sz="800" spc="-1" strike="noStrike">
                 <a:solidFill>
                   <a:schemeClr val="dk1"/>
@@ -20212,7 +20212,7 @@
               </a:lnSpc>
               <a:buNone/>
             </a:pPr>
-            <a:fld id="{BB910784-D907-417F-BF79-8F00226EE4D4}" type="slidenum">
+            <a:fld id="{25B8355D-9108-4A74-AC8C-551AA758E4FC}" type="slidenum">
               <a:rPr b="0" lang="de-DE" sz="800" spc="-1" strike="noStrike">
                 <a:solidFill>
                   <a:schemeClr val="dk1"/>
@@ -20490,7 +20490,7 @@
               </a:lnSpc>
               <a:buNone/>
             </a:pPr>
-            <a:fld id="{98A001C0-8E25-4258-8FFD-3A8010CF0C48}" type="slidenum">
+            <a:fld id="{53B8DC48-62DD-4EDA-AF4D-33EE867BFDAF}" type="slidenum">
               <a:rPr b="0" lang="de-DE" sz="800" spc="-1" strike="noStrike">
                 <a:solidFill>
                   <a:schemeClr val="dk1"/>
@@ -42051,7 +42051,7 @@
                 </a:solidFill>
                 <a:latin typeface="Noto Sans"/>
               </a:rPr>
-              <a:t>Vielen Dank für eure Aufmerksamkeit</a:t>
+              <a:t>Vielen Dank für Ihre Aufmerksamkeit</a:t>
             </a:r>
             <a:endParaRPr b="0" lang="en-US" sz="3859" spc="-1" strike="noStrike">
               <a:solidFill>
